--- a/submission_docs/TalentLens_AI_Presentation.pptx
+++ b/submission_docs/TalentLens_AI_Presentation.pptx
@@ -5,18 +5,18 @@
     <p:sldMasterId id="2147483648" r:id="rId1"/>
   </p:sldMasterIdLst>
   <p:sldIdLst>
-    <p:sldId id="256" r:id="rId7"/>
-    <p:sldId id="257" r:id="rId8"/>
-    <p:sldId id="258" r:id="rId9"/>
-    <p:sldId id="259" r:id="rId10"/>
-    <p:sldId id="260" r:id="rId11"/>
-    <p:sldId id="261" r:id="rId12"/>
-    <p:sldId id="262" r:id="rId13"/>
-    <p:sldId id="263" r:id="rId14"/>
-    <p:sldId id="264" r:id="rId15"/>
-    <p:sldId id="265" r:id="rId16"/>
+    <p:sldId id="256" r:id="rId2"/>
+    <p:sldId id="257" r:id="rId3"/>
+    <p:sldId id="258" r:id="rId4"/>
+    <p:sldId id="259" r:id="rId5"/>
+    <p:sldId id="260" r:id="rId6"/>
+    <p:sldId id="261" r:id="rId7"/>
+    <p:sldId id="262" r:id="rId8"/>
+    <p:sldId id="263" r:id="rId9"/>
+    <p:sldId id="264" r:id="rId10"/>
+    <p:sldId id="265" r:id="rId11"/>
   </p:sldIdLst>
-  <p:sldSz cx="9144000" cy="5143500" type="screen4x3"/>
+  <p:sldSz cx="9144000" cy="5143500" type="screen16x9"/>
   <p:notesSz cx="6858000" cy="9144000"/>
   <p:defaultTextStyle>
     <a:defPPr>
@@ -113,6 +113,22 @@
       </a:defRPr>
     </a:lvl9pPr>
   </p:defaultTextStyle>
+  <p:extLst>
+    <p:ext uri="{EFAFB233-063F-42B5-8137-9DF3F51BA10A}">
+      <p15:sldGuideLst xmlns:p15="http://schemas.microsoft.com/office/powerpoint/2012/main">
+        <p15:guide id="1" orient="horz" pos="2160">
+          <p15:clr>
+            <a:srgbClr val="A4A3A4"/>
+          </p15:clr>
+        </p15:guide>
+        <p15:guide id="2" pos="2880">
+          <p15:clr>
+            <a:srgbClr val="A4A3A4"/>
+          </p15:clr>
+        </p15:guide>
+      </p15:sldGuideLst>
+    </p:ext>
+  </p:extLst>
 </p:presentation>
 </file>
 
@@ -154,10 +170,9 @@
           <a:lstStyle/>
           <a:p>
             <a:r>
-              <a:rPr lang="en-US" smtClean="0"/>
+              <a:rPr lang="en-US"/>
               <a:t>Click to edit Master title style</a:t>
             </a:r>
-            <a:endParaRPr lang="en-US"/>
           </a:p>
         </p:txBody>
       </p:sp>
@@ -273,10 +288,9 @@
           </a:lstStyle>
           <a:p>
             <a:r>
-              <a:rPr lang="en-US" smtClean="0"/>
+              <a:rPr lang="en-US"/>
               <a:t>Click to edit Master subtitle style</a:t>
             </a:r>
-            <a:endParaRPr lang="en-US"/>
           </a:p>
         </p:txBody>
       </p:sp>
@@ -297,7 +311,7 @@
           <a:p>
             <a:fld id="{5BCAD085-E8A6-8845-BD4E-CB4CCA059FC4}" type="datetimeFigureOut">
               <a:rPr lang="en-US" smtClean="0"/>
-              <a:t>1/27/13</a:t>
+              <a:t>10/18/2026</a:t>
             </a:fld>
             <a:endParaRPr lang="en-US"/>
           </a:p>
@@ -391,10 +405,9 @@
           <a:lstStyle/>
           <a:p>
             <a:r>
-              <a:rPr lang="en-US" smtClean="0"/>
+              <a:rPr lang="en-US"/>
               <a:t>Click to edit Master title style</a:t>
             </a:r>
-            <a:endParaRPr lang="en-US"/>
           </a:p>
         </p:txBody>
       </p:sp>
@@ -415,38 +428,37 @@
           <a:p>
             <a:pPr lvl="0"/>
             <a:r>
-              <a:rPr lang="en-US" smtClean="0"/>
+              <a:rPr lang="en-US"/>
               <a:t>Click to edit Master text styles</a:t>
             </a:r>
           </a:p>
           <a:p>
             <a:pPr lvl="1"/>
             <a:r>
-              <a:rPr lang="en-US" smtClean="0"/>
+              <a:rPr lang="en-US"/>
               <a:t>Second level</a:t>
             </a:r>
           </a:p>
           <a:p>
             <a:pPr lvl="2"/>
             <a:r>
-              <a:rPr lang="en-US" smtClean="0"/>
+              <a:rPr lang="en-US"/>
               <a:t>Third level</a:t>
             </a:r>
           </a:p>
           <a:p>
             <a:pPr lvl="3"/>
             <a:r>
-              <a:rPr lang="en-US" smtClean="0"/>
+              <a:rPr lang="en-US"/>
               <a:t>Fourth level</a:t>
             </a:r>
           </a:p>
           <a:p>
             <a:pPr lvl="4"/>
             <a:r>
-              <a:rPr lang="en-US" smtClean="0"/>
+              <a:rPr lang="en-US"/>
               <a:t>Fifth level</a:t>
             </a:r>
-            <a:endParaRPr lang="en-US"/>
           </a:p>
         </p:txBody>
       </p:sp>
@@ -467,7 +479,7 @@
           <a:p>
             <a:fld id="{5BCAD085-E8A6-8845-BD4E-CB4CCA059FC4}" type="datetimeFigureOut">
               <a:rPr lang="en-US" smtClean="0"/>
-              <a:t>1/27/13</a:t>
+              <a:t>10/18/2026</a:t>
             </a:fld>
             <a:endParaRPr lang="en-US"/>
           </a:p>
@@ -566,10 +578,9 @@
           <a:lstStyle/>
           <a:p>
             <a:r>
-              <a:rPr lang="en-US" smtClean="0"/>
+              <a:rPr lang="en-US"/>
               <a:t>Click to edit Master title style</a:t>
             </a:r>
-            <a:endParaRPr lang="en-US"/>
           </a:p>
         </p:txBody>
       </p:sp>
@@ -595,38 +606,37 @@
           <a:p>
             <a:pPr lvl="0"/>
             <a:r>
-              <a:rPr lang="en-US" smtClean="0"/>
+              <a:rPr lang="en-US"/>
               <a:t>Click to edit Master text styles</a:t>
             </a:r>
           </a:p>
           <a:p>
             <a:pPr lvl="1"/>
             <a:r>
-              <a:rPr lang="en-US" smtClean="0"/>
+              <a:rPr lang="en-US"/>
               <a:t>Second level</a:t>
             </a:r>
           </a:p>
           <a:p>
             <a:pPr lvl="2"/>
             <a:r>
-              <a:rPr lang="en-US" smtClean="0"/>
+              <a:rPr lang="en-US"/>
               <a:t>Third level</a:t>
             </a:r>
           </a:p>
           <a:p>
             <a:pPr lvl="3"/>
             <a:r>
-              <a:rPr lang="en-US" smtClean="0"/>
+              <a:rPr lang="en-US"/>
               <a:t>Fourth level</a:t>
             </a:r>
           </a:p>
           <a:p>
             <a:pPr lvl="4"/>
             <a:r>
-              <a:rPr lang="en-US" smtClean="0"/>
+              <a:rPr lang="en-US"/>
               <a:t>Fifth level</a:t>
             </a:r>
-            <a:endParaRPr lang="en-US"/>
           </a:p>
         </p:txBody>
       </p:sp>
@@ -647,7 +657,7 @@
           <a:p>
             <a:fld id="{5BCAD085-E8A6-8845-BD4E-CB4CCA059FC4}" type="datetimeFigureOut">
               <a:rPr lang="en-US" smtClean="0"/>
-              <a:t>1/27/13</a:t>
+              <a:t>10/18/2026</a:t>
             </a:fld>
             <a:endParaRPr lang="en-US"/>
           </a:p>
@@ -741,10 +751,9 @@
           <a:lstStyle/>
           <a:p>
             <a:r>
-              <a:rPr lang="en-US" smtClean="0"/>
+              <a:rPr lang="en-US"/>
               <a:t>Click to edit Master title style</a:t>
             </a:r>
-            <a:endParaRPr lang="en-US"/>
           </a:p>
         </p:txBody>
       </p:sp>
@@ -765,38 +774,37 @@
           <a:p>
             <a:pPr lvl="0"/>
             <a:r>
-              <a:rPr lang="en-US" smtClean="0"/>
+              <a:rPr lang="en-US"/>
               <a:t>Click to edit Master text styles</a:t>
             </a:r>
           </a:p>
           <a:p>
             <a:pPr lvl="1"/>
             <a:r>
-              <a:rPr lang="en-US" smtClean="0"/>
+              <a:rPr lang="en-US"/>
               <a:t>Second level</a:t>
             </a:r>
           </a:p>
           <a:p>
             <a:pPr lvl="2"/>
             <a:r>
-              <a:rPr lang="en-US" smtClean="0"/>
+              <a:rPr lang="en-US"/>
               <a:t>Third level</a:t>
             </a:r>
           </a:p>
           <a:p>
             <a:pPr lvl="3"/>
             <a:r>
-              <a:rPr lang="en-US" smtClean="0"/>
+              <a:rPr lang="en-US"/>
               <a:t>Fourth level</a:t>
             </a:r>
           </a:p>
           <a:p>
             <a:pPr lvl="4"/>
             <a:r>
-              <a:rPr lang="en-US" smtClean="0"/>
+              <a:rPr lang="en-US"/>
               <a:t>Fifth level</a:t>
             </a:r>
-            <a:endParaRPr lang="en-US"/>
           </a:p>
         </p:txBody>
       </p:sp>
@@ -817,7 +825,7 @@
           <a:p>
             <a:fld id="{5BCAD085-E8A6-8845-BD4E-CB4CCA059FC4}" type="datetimeFigureOut">
               <a:rPr lang="en-US" smtClean="0"/>
-              <a:t>1/27/13</a:t>
+              <a:t>10/18/2026</a:t>
             </a:fld>
             <a:endParaRPr lang="en-US"/>
           </a:p>
@@ -920,10 +928,9 @@
           </a:lstStyle>
           <a:p>
             <a:r>
-              <a:rPr lang="en-US" smtClean="0"/>
+              <a:rPr lang="en-US"/>
               <a:t>Click to edit Master title style</a:t>
             </a:r>
-            <a:endParaRPr lang="en-US"/>
           </a:p>
         </p:txBody>
       </p:sp>
@@ -1040,7 +1047,7 @@
           <a:p>
             <a:pPr lvl="0"/>
             <a:r>
-              <a:rPr lang="en-US" smtClean="0"/>
+              <a:rPr lang="en-US"/>
               <a:t>Click to edit Master text styles</a:t>
             </a:r>
           </a:p>
@@ -1063,7 +1070,7 @@
           <a:p>
             <a:fld id="{5BCAD085-E8A6-8845-BD4E-CB4CCA059FC4}" type="datetimeFigureOut">
               <a:rPr lang="en-US" smtClean="0"/>
-              <a:t>1/27/13</a:t>
+              <a:t>10/18/2026</a:t>
             </a:fld>
             <a:endParaRPr lang="en-US"/>
           </a:p>
@@ -1157,10 +1164,9 @@
           <a:lstStyle/>
           <a:p>
             <a:r>
-              <a:rPr lang="en-US" smtClean="0"/>
+              <a:rPr lang="en-US"/>
               <a:t>Click to edit Master title style</a:t>
             </a:r>
-            <a:endParaRPr lang="en-US"/>
           </a:p>
         </p:txBody>
       </p:sp>
@@ -1214,38 +1220,37 @@
           <a:p>
             <a:pPr lvl="0"/>
             <a:r>
-              <a:rPr lang="en-US" smtClean="0"/>
+              <a:rPr lang="en-US"/>
               <a:t>Click to edit Master text styles</a:t>
             </a:r>
           </a:p>
           <a:p>
             <a:pPr lvl="1"/>
             <a:r>
-              <a:rPr lang="en-US" smtClean="0"/>
+              <a:rPr lang="en-US"/>
               <a:t>Second level</a:t>
             </a:r>
           </a:p>
           <a:p>
             <a:pPr lvl="2"/>
             <a:r>
-              <a:rPr lang="en-US" smtClean="0"/>
+              <a:rPr lang="en-US"/>
               <a:t>Third level</a:t>
             </a:r>
           </a:p>
           <a:p>
             <a:pPr lvl="3"/>
             <a:r>
-              <a:rPr lang="en-US" smtClean="0"/>
+              <a:rPr lang="en-US"/>
               <a:t>Fourth level</a:t>
             </a:r>
           </a:p>
           <a:p>
             <a:pPr lvl="4"/>
             <a:r>
-              <a:rPr lang="en-US" smtClean="0"/>
+              <a:rPr lang="en-US"/>
               <a:t>Fifth level</a:t>
             </a:r>
-            <a:endParaRPr lang="en-US"/>
           </a:p>
         </p:txBody>
       </p:sp>
@@ -1299,38 +1304,37 @@
           <a:p>
             <a:pPr lvl="0"/>
             <a:r>
-              <a:rPr lang="en-US" smtClean="0"/>
+              <a:rPr lang="en-US"/>
               <a:t>Click to edit Master text styles</a:t>
             </a:r>
           </a:p>
           <a:p>
             <a:pPr lvl="1"/>
             <a:r>
-              <a:rPr lang="en-US" smtClean="0"/>
+              <a:rPr lang="en-US"/>
               <a:t>Second level</a:t>
             </a:r>
           </a:p>
           <a:p>
             <a:pPr lvl="2"/>
             <a:r>
-              <a:rPr lang="en-US" smtClean="0"/>
+              <a:rPr lang="en-US"/>
               <a:t>Third level</a:t>
             </a:r>
           </a:p>
           <a:p>
             <a:pPr lvl="3"/>
             <a:r>
-              <a:rPr lang="en-US" smtClean="0"/>
+              <a:rPr lang="en-US"/>
               <a:t>Fourth level</a:t>
             </a:r>
           </a:p>
           <a:p>
             <a:pPr lvl="4"/>
             <a:r>
-              <a:rPr lang="en-US" smtClean="0"/>
+              <a:rPr lang="en-US"/>
               <a:t>Fifth level</a:t>
             </a:r>
-            <a:endParaRPr lang="en-US"/>
           </a:p>
         </p:txBody>
       </p:sp>
@@ -1351,7 +1355,7 @@
           <a:p>
             <a:fld id="{5BCAD085-E8A6-8845-BD4E-CB4CCA059FC4}" type="datetimeFigureOut">
               <a:rPr lang="en-US" smtClean="0"/>
-              <a:t>1/27/13</a:t>
+              <a:t>10/18/2026</a:t>
             </a:fld>
             <a:endParaRPr lang="en-US"/>
           </a:p>
@@ -1449,10 +1453,9 @@
           </a:lstStyle>
           <a:p>
             <a:r>
-              <a:rPr lang="en-US" smtClean="0"/>
+              <a:rPr lang="en-US"/>
               <a:t>Click to edit Master title style</a:t>
             </a:r>
-            <a:endParaRPr lang="en-US"/>
           </a:p>
         </p:txBody>
       </p:sp>
@@ -1515,7 +1518,7 @@
           <a:p>
             <a:pPr lvl="0"/>
             <a:r>
-              <a:rPr lang="en-US" smtClean="0"/>
+              <a:rPr lang="en-US"/>
               <a:t>Click to edit Master text styles</a:t>
             </a:r>
           </a:p>
@@ -1571,38 +1574,37 @@
           <a:p>
             <a:pPr lvl="0"/>
             <a:r>
-              <a:rPr lang="en-US" smtClean="0"/>
+              <a:rPr lang="en-US"/>
               <a:t>Click to edit Master text styles</a:t>
             </a:r>
           </a:p>
           <a:p>
             <a:pPr lvl="1"/>
             <a:r>
-              <a:rPr lang="en-US" smtClean="0"/>
+              <a:rPr lang="en-US"/>
               <a:t>Second level</a:t>
             </a:r>
           </a:p>
           <a:p>
             <a:pPr lvl="2"/>
             <a:r>
-              <a:rPr lang="en-US" smtClean="0"/>
+              <a:rPr lang="en-US"/>
               <a:t>Third level</a:t>
             </a:r>
           </a:p>
           <a:p>
             <a:pPr lvl="3"/>
             <a:r>
-              <a:rPr lang="en-US" smtClean="0"/>
+              <a:rPr lang="en-US"/>
               <a:t>Fourth level</a:t>
             </a:r>
           </a:p>
           <a:p>
             <a:pPr lvl="4"/>
             <a:r>
-              <a:rPr lang="en-US" smtClean="0"/>
+              <a:rPr lang="en-US"/>
               <a:t>Fifth level</a:t>
             </a:r>
-            <a:endParaRPr lang="en-US"/>
           </a:p>
         </p:txBody>
       </p:sp>
@@ -1665,7 +1667,7 @@
           <a:p>
             <a:pPr lvl="0"/>
             <a:r>
-              <a:rPr lang="en-US" smtClean="0"/>
+              <a:rPr lang="en-US"/>
               <a:t>Click to edit Master text styles</a:t>
             </a:r>
           </a:p>
@@ -1721,38 +1723,37 @@
           <a:p>
             <a:pPr lvl="0"/>
             <a:r>
-              <a:rPr lang="en-US" smtClean="0"/>
+              <a:rPr lang="en-US"/>
               <a:t>Click to edit Master text styles</a:t>
             </a:r>
           </a:p>
           <a:p>
             <a:pPr lvl="1"/>
             <a:r>
-              <a:rPr lang="en-US" smtClean="0"/>
+              <a:rPr lang="en-US"/>
               <a:t>Second level</a:t>
             </a:r>
           </a:p>
           <a:p>
             <a:pPr lvl="2"/>
             <a:r>
-              <a:rPr lang="en-US" smtClean="0"/>
+              <a:rPr lang="en-US"/>
               <a:t>Third level</a:t>
             </a:r>
           </a:p>
           <a:p>
             <a:pPr lvl="3"/>
             <a:r>
-              <a:rPr lang="en-US" smtClean="0"/>
+              <a:rPr lang="en-US"/>
               <a:t>Fourth level</a:t>
             </a:r>
           </a:p>
           <a:p>
             <a:pPr lvl="4"/>
             <a:r>
-              <a:rPr lang="en-US" smtClean="0"/>
+              <a:rPr lang="en-US"/>
               <a:t>Fifth level</a:t>
             </a:r>
-            <a:endParaRPr lang="en-US"/>
           </a:p>
         </p:txBody>
       </p:sp>
@@ -1773,7 +1774,7 @@
           <a:p>
             <a:fld id="{5BCAD085-E8A6-8845-BD4E-CB4CCA059FC4}" type="datetimeFigureOut">
               <a:rPr lang="en-US" smtClean="0"/>
-              <a:t>1/27/13</a:t>
+              <a:t>10/18/2026</a:t>
             </a:fld>
             <a:endParaRPr lang="en-US"/>
           </a:p>
@@ -1867,10 +1868,9 @@
           <a:lstStyle/>
           <a:p>
             <a:r>
-              <a:rPr lang="en-US" smtClean="0"/>
+              <a:rPr lang="en-US"/>
               <a:t>Click to edit Master title style</a:t>
             </a:r>
-            <a:endParaRPr lang="en-US"/>
           </a:p>
         </p:txBody>
       </p:sp>
@@ -1891,7 +1891,7 @@
           <a:p>
             <a:fld id="{5BCAD085-E8A6-8845-BD4E-CB4CCA059FC4}" type="datetimeFigureOut">
               <a:rPr lang="en-US" smtClean="0"/>
-              <a:t>1/27/13</a:t>
+              <a:t>10/18/2026</a:t>
             </a:fld>
             <a:endParaRPr lang="en-US"/>
           </a:p>
@@ -1986,7 +1986,7 @@
           <a:p>
             <a:fld id="{5BCAD085-E8A6-8845-BD4E-CB4CCA059FC4}" type="datetimeFigureOut">
               <a:rPr lang="en-US" smtClean="0"/>
-              <a:t>1/27/13</a:t>
+              <a:t>10/18/2026</a:t>
             </a:fld>
             <a:endParaRPr lang="en-US"/>
           </a:p>
@@ -2089,10 +2089,9 @@
           </a:lstStyle>
           <a:p>
             <a:r>
-              <a:rPr lang="en-US" smtClean="0"/>
+              <a:rPr lang="en-US"/>
               <a:t>Click to edit Master title style</a:t>
             </a:r>
-            <a:endParaRPr lang="en-US"/>
           </a:p>
         </p:txBody>
       </p:sp>
@@ -2146,38 +2145,37 @@
           <a:p>
             <a:pPr lvl="0"/>
             <a:r>
-              <a:rPr lang="en-US" smtClean="0"/>
+              <a:rPr lang="en-US"/>
               <a:t>Click to edit Master text styles</a:t>
             </a:r>
           </a:p>
           <a:p>
             <a:pPr lvl="1"/>
             <a:r>
-              <a:rPr lang="en-US" smtClean="0"/>
+              <a:rPr lang="en-US"/>
               <a:t>Second level</a:t>
             </a:r>
           </a:p>
           <a:p>
             <a:pPr lvl="2"/>
             <a:r>
-              <a:rPr lang="en-US" smtClean="0"/>
+              <a:rPr lang="en-US"/>
               <a:t>Third level</a:t>
             </a:r>
           </a:p>
           <a:p>
             <a:pPr lvl="3"/>
             <a:r>
-              <a:rPr lang="en-US" smtClean="0"/>
+              <a:rPr lang="en-US"/>
               <a:t>Fourth level</a:t>
             </a:r>
           </a:p>
           <a:p>
             <a:pPr lvl="4"/>
             <a:r>
-              <a:rPr lang="en-US" smtClean="0"/>
+              <a:rPr lang="en-US"/>
               <a:t>Fifth level</a:t>
             </a:r>
-            <a:endParaRPr lang="en-US"/>
           </a:p>
         </p:txBody>
       </p:sp>
@@ -2240,7 +2238,7 @@
           <a:p>
             <a:pPr lvl="0"/>
             <a:r>
-              <a:rPr lang="en-US" smtClean="0"/>
+              <a:rPr lang="en-US"/>
               <a:t>Click to edit Master text styles</a:t>
             </a:r>
           </a:p>
@@ -2263,7 +2261,7 @@
           <a:p>
             <a:fld id="{5BCAD085-E8A6-8845-BD4E-CB4CCA059FC4}" type="datetimeFigureOut">
               <a:rPr lang="en-US" smtClean="0"/>
-              <a:t>1/27/13</a:t>
+              <a:t>10/18/2026</a:t>
             </a:fld>
             <a:endParaRPr lang="en-US"/>
           </a:p>
@@ -2366,10 +2364,9 @@
           </a:lstStyle>
           <a:p>
             <a:r>
-              <a:rPr lang="en-US" smtClean="0"/>
+              <a:rPr lang="en-US"/>
               <a:t>Click to edit Master title style</a:t>
             </a:r>
-            <a:endParaRPr lang="en-US"/>
           </a:p>
         </p:txBody>
       </p:sp>
@@ -2493,7 +2490,7 @@
           <a:p>
             <a:pPr lvl="0"/>
             <a:r>
-              <a:rPr lang="en-US" smtClean="0"/>
+              <a:rPr lang="en-US"/>
               <a:t>Click to edit Master text styles</a:t>
             </a:r>
           </a:p>
@@ -2516,7 +2513,7 @@
           <a:p>
             <a:fld id="{5BCAD085-E8A6-8845-BD4E-CB4CCA059FC4}" type="datetimeFigureOut">
               <a:rPr lang="en-US" smtClean="0"/>
-              <a:t>1/27/13</a:t>
+              <a:t>10/18/2026</a:t>
             </a:fld>
             <a:endParaRPr lang="en-US"/>
           </a:p>
@@ -2625,10 +2622,9 @@
           <a:lstStyle/>
           <a:p>
             <a:r>
-              <a:rPr lang="en-US" smtClean="0"/>
+              <a:rPr lang="en-US"/>
               <a:t>Click to edit Master title style</a:t>
             </a:r>
-            <a:endParaRPr lang="en-US"/>
           </a:p>
         </p:txBody>
       </p:sp>
@@ -2659,38 +2655,37 @@
           <a:p>
             <a:pPr lvl="0"/>
             <a:r>
-              <a:rPr lang="en-US" smtClean="0"/>
+              <a:rPr lang="en-US"/>
               <a:t>Click to edit Master text styles</a:t>
             </a:r>
           </a:p>
           <a:p>
             <a:pPr lvl="1"/>
             <a:r>
-              <a:rPr lang="en-US" smtClean="0"/>
+              <a:rPr lang="en-US"/>
               <a:t>Second level</a:t>
             </a:r>
           </a:p>
           <a:p>
             <a:pPr lvl="2"/>
             <a:r>
-              <a:rPr lang="en-US" smtClean="0"/>
+              <a:rPr lang="en-US"/>
               <a:t>Third level</a:t>
             </a:r>
           </a:p>
           <a:p>
             <a:pPr lvl="3"/>
             <a:r>
-              <a:rPr lang="en-US" smtClean="0"/>
+              <a:rPr lang="en-US"/>
               <a:t>Fourth level</a:t>
             </a:r>
           </a:p>
           <a:p>
             <a:pPr lvl="4"/>
             <a:r>
-              <a:rPr lang="en-US" smtClean="0"/>
+              <a:rPr lang="en-US"/>
               <a:t>Fifth level</a:t>
             </a:r>
-            <a:endParaRPr lang="en-US"/>
           </a:p>
         </p:txBody>
       </p:sp>
@@ -2729,7 +2724,7 @@
           <a:p>
             <a:fld id="{5BCAD085-E8A6-8845-BD4E-CB4CCA059FC4}" type="datetimeFigureOut">
               <a:rPr lang="en-US" smtClean="0"/>
-              <a:t>1/27/13</a:t>
+              <a:t>10/18/2026</a:t>
             </a:fld>
             <a:endParaRPr lang="en-US"/>
           </a:p>
@@ -3088,7 +3083,7 @@
 </file>
 
 <file path=ppt/slides/slide1.xml><?xml version="1.0" encoding="utf-8"?>
-<p:sld xmlns:a="http://schemas.openxmlformats.org/drawingml/2006/main" xmlns:p="http://schemas.openxmlformats.org/presentationml/2006/main" xmlns:r="http://schemas.openxmlformats.org/officeDocument/2006/relationships">
+<p:sld xmlns:a="http://schemas.openxmlformats.org/drawingml/2006/main" xmlns:r="http://schemas.openxmlformats.org/officeDocument/2006/relationships" xmlns:p="http://schemas.openxmlformats.org/presentationml/2006/main">
   <p:cSld>
     <p:bg>
       <p:bgPr>
@@ -3104,7 +3099,14 @@
         <p:cNvGrpSpPr/>
         <p:nvPr/>
       </p:nvGrpSpPr>
-      <p:grpSpPr/>
+      <p:grpSpPr>
+        <a:xfrm>
+          <a:off x="0" y="0"/>
+          <a:ext cx="0" cy="0"/>
+          <a:chOff x="0" y="0"/>
+          <a:chExt cx="0" cy="0"/>
+        </a:xfrm>
+      </p:grpSpPr>
       <p:sp>
         <p:nvSpPr>
           <p:cNvPr id="2" name="Rectangle 1"/>
@@ -3145,6 +3147,7 @@
           <a:lstStyle/>
           <a:p>
             <a:pPr algn="ctr"/>
+            <a:endParaRPr/>
           </a:p>
         </p:txBody>
       </p:sp>
@@ -3157,7 +3160,7 @@
         <p:spPr>
           <a:xfrm>
             <a:off x="1005840" y="914400"/>
-            <a:ext cx="7498079" cy="3108960"/>
+            <a:ext cx="7498079" cy="1682512"/>
           </a:xfrm>
           <a:prstGeom prst="rect">
             <a:avLst/>
@@ -3178,7 +3181,12 @@
               </a:defRPr>
             </a:pPr>
             <a:r>
-              <a:t>TalentLens AI</a:t>
+              <a:rPr dirty="0" err="1"/>
+              <a:t>TalentLens</a:t>
+            </a:r>
+            <a:r>
+              <a:rPr dirty="0"/>
+              <a:t> AI</a:t>
             </a:r>
           </a:p>
           <a:p>
@@ -3193,6 +3201,7 @@
               </a:defRPr>
             </a:pPr>
             <a:r>
+              <a:rPr dirty="0"/>
               <a:t>AI Resume Screening System — College Capstone Project</a:t>
             </a:r>
           </a:p>
@@ -3205,7 +3214,16 @@
               </a:defRPr>
             </a:pPr>
             <a:r>
-              <a:t>Author: [STUDENT_NAME] (Roll No: [ROLL_NUMBER])</a:t>
+              <a:rPr dirty="0"/>
+              <a:t>Author: </a:t>
+            </a:r>
+            <a:r>
+              <a:rPr lang="en-IN" dirty="0"/>
+              <a:t>Rajendra Prasad Pedamallu</a:t>
+            </a:r>
+            <a:r>
+              <a:rPr dirty="0"/>
+              <a:t> </a:t>
             </a:r>
           </a:p>
           <a:p>
@@ -3217,8 +3235,14 @@
               </a:defRPr>
             </a:pPr>
             <a:r>
-              <a:t>Supervisor: [SUPERVISOR_NAME] • [DEPARTMENT_NAME], [COLLEGE_NAME]</a:t>
-            </a:r>
+              <a:rPr dirty="0"/>
+              <a:t> COLLEGE_NAM</a:t>
+            </a:r>
+            <a:r>
+              <a:rPr lang="en-IN" dirty="0"/>
+              <a:t>E: Bennett University</a:t>
+            </a:r>
+            <a:endParaRPr dirty="0"/>
           </a:p>
           <a:p>
             <a:pPr>
@@ -3229,7 +3253,20 @@
               </a:defRPr>
             </a:pPr>
             <a:r>
-              <a:t>Repository: https://github.com/Rajendra13188/TalentLens-AI</a:t>
+              <a:rPr dirty="0"/>
+              <a:t>Re</a:t>
+            </a:r>
+            <a:r>
+              <a:rPr lang="en-IN" dirty="0"/>
+              <a:t>/</a:t>
+            </a:r>
+            <a:r>
+              <a:rPr dirty="0" err="1"/>
+              <a:t>pository</a:t>
+            </a:r>
+            <a:r>
+              <a:rPr dirty="0"/>
+              <a:t>: https://github.com/Rajendra13188/TalentLens-AI</a:t>
             </a:r>
           </a:p>
         </p:txBody>
@@ -3243,7 +3280,7 @@
 </file>
 
 <file path=ppt/slides/slide10.xml><?xml version="1.0" encoding="utf-8"?>
-<p:sld xmlns:a="http://schemas.openxmlformats.org/drawingml/2006/main" xmlns:p="http://schemas.openxmlformats.org/presentationml/2006/main" xmlns:r="http://schemas.openxmlformats.org/officeDocument/2006/relationships">
+<p:sld xmlns:a="http://schemas.openxmlformats.org/drawingml/2006/main" xmlns:r="http://schemas.openxmlformats.org/officeDocument/2006/relationships" xmlns:p="http://schemas.openxmlformats.org/presentationml/2006/main">
   <p:cSld>
     <p:bg>
       <p:bgPr>
@@ -3259,7 +3296,14 @@
         <p:cNvGrpSpPr/>
         <p:nvPr/>
       </p:nvGrpSpPr>
-      <p:grpSpPr/>
+      <p:grpSpPr>
+        <a:xfrm>
+          <a:off x="0" y="0"/>
+          <a:ext cx="0" cy="0"/>
+          <a:chOff x="0" y="0"/>
+          <a:chExt cx="0" cy="0"/>
+        </a:xfrm>
+      </p:grpSpPr>
       <p:sp>
         <p:nvSpPr>
           <p:cNvPr id="2" name="TextBox 1"/>
@@ -3397,7 +3441,7 @@
 </file>
 
 <file path=ppt/slides/slide2.xml><?xml version="1.0" encoding="utf-8"?>
-<p:sld xmlns:a="http://schemas.openxmlformats.org/drawingml/2006/main" xmlns:p="http://schemas.openxmlformats.org/presentationml/2006/main" xmlns:r="http://schemas.openxmlformats.org/officeDocument/2006/relationships">
+<p:sld xmlns:a="http://schemas.openxmlformats.org/drawingml/2006/main" xmlns:r="http://schemas.openxmlformats.org/officeDocument/2006/relationships" xmlns:p="http://schemas.openxmlformats.org/presentationml/2006/main">
   <p:cSld>
     <p:bg>
       <p:bgPr>
@@ -3413,7 +3457,14 @@
         <p:cNvGrpSpPr/>
         <p:nvPr/>
       </p:nvGrpSpPr>
-      <p:grpSpPr/>
+      <p:grpSpPr>
+        <a:xfrm>
+          <a:off x="0" y="0"/>
+          <a:ext cx="0" cy="0"/>
+          <a:chOff x="0" y="0"/>
+          <a:chExt cx="0" cy="0"/>
+        </a:xfrm>
+      </p:grpSpPr>
       <p:sp>
         <p:nvSpPr>
           <p:cNvPr id="2" name="TextBox 1"/>
@@ -3502,7 +3553,7 @@
           </a:fontRef>
         </p:style>
         <p:txBody>
-          <a:bodyPr rtlCol="0" anchor="ctr" wrap="square"/>
+          <a:bodyPr wrap="square" rtlCol="0" anchor="ctr"/>
           <a:lstStyle/>
           <a:p>
             <a:pPr algn="ctr">
@@ -3619,7 +3670,7 @@
           </a:fontRef>
         </p:style>
         <p:txBody>
-          <a:bodyPr rtlCol="0" anchor="ctr" wrap="square"/>
+          <a:bodyPr wrap="square" rtlCol="0" anchor="ctr"/>
           <a:lstStyle/>
           <a:p>
             <a:pPr algn="ctr">
@@ -3707,7 +3758,7 @@
 </file>
 
 <file path=ppt/slides/slide3.xml><?xml version="1.0" encoding="utf-8"?>
-<p:sld xmlns:a="http://schemas.openxmlformats.org/drawingml/2006/main" xmlns:p="http://schemas.openxmlformats.org/presentationml/2006/main" xmlns:r="http://schemas.openxmlformats.org/officeDocument/2006/relationships">
+<p:sld xmlns:a="http://schemas.openxmlformats.org/drawingml/2006/main" xmlns:r="http://schemas.openxmlformats.org/officeDocument/2006/relationships" xmlns:p="http://schemas.openxmlformats.org/presentationml/2006/main">
   <p:cSld>
     <p:bg>
       <p:bgPr>
@@ -3723,7 +3774,14 @@
         <p:cNvGrpSpPr/>
         <p:nvPr/>
       </p:nvGrpSpPr>
-      <p:grpSpPr/>
+      <p:grpSpPr>
+        <a:xfrm>
+          <a:off x="0" y="0"/>
+          <a:ext cx="0" cy="0"/>
+          <a:chOff x="0" y="0"/>
+          <a:chExt cx="0" cy="0"/>
+        </a:xfrm>
+      </p:grpSpPr>
       <p:sp>
         <p:nvSpPr>
           <p:cNvPr id="2" name="TextBox 1"/>
@@ -3807,7 +3865,7 @@
 </file>
 
 <file path=ppt/slides/slide4.xml><?xml version="1.0" encoding="utf-8"?>
-<p:sld xmlns:a="http://schemas.openxmlformats.org/drawingml/2006/main" xmlns:p="http://schemas.openxmlformats.org/presentationml/2006/main" xmlns:r="http://schemas.openxmlformats.org/officeDocument/2006/relationships">
+<p:sld xmlns:a="http://schemas.openxmlformats.org/drawingml/2006/main" xmlns:r="http://schemas.openxmlformats.org/officeDocument/2006/relationships" xmlns:p="http://schemas.openxmlformats.org/presentationml/2006/main">
   <p:cSld>
     <p:bg>
       <p:bgPr>
@@ -3823,7 +3881,14 @@
         <p:cNvGrpSpPr/>
         <p:nvPr/>
       </p:nvGrpSpPr>
-      <p:grpSpPr/>
+      <p:grpSpPr>
+        <a:xfrm>
+          <a:off x="0" y="0"/>
+          <a:ext cx="0" cy="0"/>
+          <a:chOff x="0" y="0"/>
+          <a:chExt cx="0" cy="0"/>
+        </a:xfrm>
+      </p:grpSpPr>
       <p:sp>
         <p:nvSpPr>
           <p:cNvPr id="2" name="TextBox 1"/>
@@ -3912,7 +3977,7 @@
           </a:fontRef>
         </p:style>
         <p:txBody>
-          <a:bodyPr rtlCol="0" anchor="ctr" wrap="square"/>
+          <a:bodyPr wrap="square" rtlCol="0" anchor="ctr"/>
           <a:lstStyle/>
           <a:p>
             <a:pPr algn="ctr">
@@ -3993,7 +4058,7 @@
           </a:fontRef>
         </p:style>
         <p:txBody>
-          <a:bodyPr rtlCol="0" anchor="ctr" wrap="square"/>
+          <a:bodyPr wrap="square" rtlCol="0" anchor="ctr"/>
           <a:lstStyle/>
           <a:p>
             <a:pPr algn="ctr">
@@ -4074,7 +4139,7 @@
           </a:fontRef>
         </p:style>
         <p:txBody>
-          <a:bodyPr rtlCol="0" anchor="ctr" wrap="square"/>
+          <a:bodyPr wrap="square" rtlCol="0" anchor="ctr"/>
           <a:lstStyle/>
           <a:p>
             <a:pPr algn="ctr">
@@ -4155,7 +4220,7 @@
           </a:fontRef>
         </p:style>
         <p:txBody>
-          <a:bodyPr rtlCol="0" anchor="ctr" wrap="square"/>
+          <a:bodyPr wrap="square" rtlCol="0" anchor="ctr"/>
           <a:lstStyle/>
           <a:p>
             <a:pPr algn="ctr">
@@ -4236,7 +4301,7 @@
           </a:fontRef>
         </p:style>
         <p:txBody>
-          <a:bodyPr rtlCol="0" anchor="ctr" wrap="square"/>
+          <a:bodyPr wrap="square" rtlCol="0" anchor="ctr"/>
           <a:lstStyle/>
           <a:p>
             <a:pPr algn="ctr">
@@ -4317,7 +4382,7 @@
           </a:fontRef>
         </p:style>
         <p:txBody>
-          <a:bodyPr rtlCol="0" anchor="ctr" wrap="square"/>
+          <a:bodyPr wrap="square" rtlCol="0" anchor="ctr"/>
           <a:lstStyle/>
           <a:p>
             <a:pPr algn="ctr">
@@ -4369,7 +4434,7 @@
 </file>
 
 <file path=ppt/slides/slide5.xml><?xml version="1.0" encoding="utf-8"?>
-<p:sld xmlns:a="http://schemas.openxmlformats.org/drawingml/2006/main" xmlns:p="http://schemas.openxmlformats.org/presentationml/2006/main" xmlns:r="http://schemas.openxmlformats.org/officeDocument/2006/relationships">
+<p:sld xmlns:a="http://schemas.openxmlformats.org/drawingml/2006/main" xmlns:r="http://schemas.openxmlformats.org/officeDocument/2006/relationships" xmlns:p="http://schemas.openxmlformats.org/presentationml/2006/main">
   <p:cSld>
     <p:bg>
       <p:bgPr>
@@ -4385,7 +4450,14 @@
         <p:cNvGrpSpPr/>
         <p:nvPr/>
       </p:nvGrpSpPr>
-      <p:grpSpPr/>
+      <p:grpSpPr>
+        <a:xfrm>
+          <a:off x="0" y="0"/>
+          <a:ext cx="0" cy="0"/>
+          <a:chOff x="0" y="0"/>
+          <a:chExt cx="0" cy="0"/>
+        </a:xfrm>
+      </p:grpSpPr>
       <p:sp>
         <p:nvSpPr>
           <p:cNvPr id="2" name="TextBox 1"/>
@@ -4472,7 +4544,7 @@
           </a:fontRef>
         </p:style>
         <p:txBody>
-          <a:bodyPr rtlCol="0" anchor="ctr" wrap="square"/>
+          <a:bodyPr wrap="square" rtlCol="0" anchor="ctr"/>
           <a:lstStyle/>
           <a:p>
             <a:pPr algn="ctr">
@@ -4538,7 +4610,7 @@
           </a:fontRef>
         </p:style>
         <p:txBody>
-          <a:bodyPr rtlCol="0" anchor="ctr" wrap="square"/>
+          <a:bodyPr wrap="square" rtlCol="0" anchor="ctr"/>
           <a:lstStyle/>
           <a:p>
             <a:pPr algn="ctr">
@@ -4623,7 +4695,7 @@
           </a:fontRef>
         </p:style>
         <p:txBody>
-          <a:bodyPr rtlCol="0" anchor="ctr" wrap="square"/>
+          <a:bodyPr wrap="square" rtlCol="0" anchor="ctr"/>
           <a:lstStyle/>
           <a:p>
             <a:pPr algn="ctr">
@@ -4712,7 +4784,7 @@
           </a:fontRef>
         </p:style>
         <p:txBody>
-          <a:bodyPr rtlCol="0" anchor="ctr" wrap="square"/>
+          <a:bodyPr wrap="square" rtlCol="0" anchor="ctr"/>
           <a:lstStyle/>
           <a:p>
             <a:pPr algn="ctr">
@@ -4768,7 +4840,7 @@
 </file>
 
 <file path=ppt/slides/slide6.xml><?xml version="1.0" encoding="utf-8"?>
-<p:sld xmlns:a="http://schemas.openxmlformats.org/drawingml/2006/main" xmlns:p="http://schemas.openxmlformats.org/presentationml/2006/main" xmlns:r="http://schemas.openxmlformats.org/officeDocument/2006/relationships">
+<p:sld xmlns:a="http://schemas.openxmlformats.org/drawingml/2006/main" xmlns:r="http://schemas.openxmlformats.org/officeDocument/2006/relationships" xmlns:p="http://schemas.openxmlformats.org/presentationml/2006/main">
   <p:cSld>
     <p:bg>
       <p:bgPr>
@@ -4784,7 +4856,14 @@
         <p:cNvGrpSpPr/>
         <p:nvPr/>
       </p:nvGrpSpPr>
-      <p:grpSpPr/>
+      <p:grpSpPr>
+        <a:xfrm>
+          <a:off x="0" y="0"/>
+          <a:ext cx="0" cy="0"/>
+          <a:chOff x="0" y="0"/>
+          <a:chExt cx="0" cy="0"/>
+        </a:xfrm>
+      </p:grpSpPr>
       <p:sp>
         <p:nvSpPr>
           <p:cNvPr id="2" name="TextBox 1"/>
@@ -4873,7 +4952,7 @@
           </a:fontRef>
         </p:style>
         <p:txBody>
-          <a:bodyPr rtlCol="0" anchor="ctr" wrap="square"/>
+          <a:bodyPr wrap="square" rtlCol="0" anchor="ctr"/>
           <a:lstStyle/>
           <a:p>
             <a:pPr algn="ctr">
@@ -4954,7 +5033,7 @@
           </a:fontRef>
         </p:style>
         <p:txBody>
-          <a:bodyPr rtlCol="0" anchor="ctr" wrap="square"/>
+          <a:bodyPr wrap="square" rtlCol="0" anchor="ctr"/>
           <a:lstStyle/>
           <a:p>
             <a:pPr algn="ctr">
@@ -5035,7 +5114,7 @@
           </a:fontRef>
         </p:style>
         <p:txBody>
-          <a:bodyPr rtlCol="0" anchor="ctr" wrap="square"/>
+          <a:bodyPr wrap="square" rtlCol="0" anchor="ctr"/>
           <a:lstStyle/>
           <a:p>
             <a:pPr algn="ctr">
@@ -5116,7 +5195,7 @@
           </a:fontRef>
         </p:style>
         <p:txBody>
-          <a:bodyPr rtlCol="0" anchor="ctr" wrap="square"/>
+          <a:bodyPr wrap="square" rtlCol="0" anchor="ctr"/>
           <a:lstStyle/>
           <a:p>
             <a:pPr algn="ctr">
@@ -5168,7 +5247,7 @@
 </file>
 
 <file path=ppt/slides/slide7.xml><?xml version="1.0" encoding="utf-8"?>
-<p:sld xmlns:a="http://schemas.openxmlformats.org/drawingml/2006/main" xmlns:p="http://schemas.openxmlformats.org/presentationml/2006/main" xmlns:r="http://schemas.openxmlformats.org/officeDocument/2006/relationships">
+<p:sld xmlns:a="http://schemas.openxmlformats.org/drawingml/2006/main" xmlns:r="http://schemas.openxmlformats.org/officeDocument/2006/relationships" xmlns:p="http://schemas.openxmlformats.org/presentationml/2006/main">
   <p:cSld>
     <p:bg>
       <p:bgPr>
@@ -5184,7 +5263,14 @@
         <p:cNvGrpSpPr/>
         <p:nvPr/>
       </p:nvGrpSpPr>
-      <p:grpSpPr/>
+      <p:grpSpPr>
+        <a:xfrm>
+          <a:off x="0" y="0"/>
+          <a:ext cx="0" cy="0"/>
+          <a:chOff x="0" y="0"/>
+          <a:chExt cx="0" cy="0"/>
+        </a:xfrm>
+      </p:grpSpPr>
       <p:sp>
         <p:nvSpPr>
           <p:cNvPr id="2" name="TextBox 1"/>
@@ -5268,7 +5354,7 @@
 </file>
 
 <file path=ppt/slides/slide8.xml><?xml version="1.0" encoding="utf-8"?>
-<p:sld xmlns:a="http://schemas.openxmlformats.org/drawingml/2006/main" xmlns:p="http://schemas.openxmlformats.org/presentationml/2006/main" xmlns:r="http://schemas.openxmlformats.org/officeDocument/2006/relationships">
+<p:sld xmlns:a="http://schemas.openxmlformats.org/drawingml/2006/main" xmlns:r="http://schemas.openxmlformats.org/officeDocument/2006/relationships" xmlns:p="http://schemas.openxmlformats.org/presentationml/2006/main">
   <p:cSld>
     <p:bg>
       <p:bgPr>
@@ -5284,7 +5370,14 @@
         <p:cNvGrpSpPr/>
         <p:nvPr/>
       </p:nvGrpSpPr>
-      <p:grpSpPr/>
+      <p:grpSpPr>
+        <a:xfrm>
+          <a:off x="0" y="0"/>
+          <a:ext cx="0" cy="0"/>
+          <a:chOff x="0" y="0"/>
+          <a:chExt cx="0" cy="0"/>
+        </a:xfrm>
+      </p:grpSpPr>
       <p:sp>
         <p:nvSpPr>
           <p:cNvPr id="2" name="TextBox 1"/>
@@ -5368,7 +5461,7 @@
 </file>
 
 <file path=ppt/slides/slide9.xml><?xml version="1.0" encoding="utf-8"?>
-<p:sld xmlns:a="http://schemas.openxmlformats.org/drawingml/2006/main" xmlns:p="http://schemas.openxmlformats.org/presentationml/2006/main" xmlns:r="http://schemas.openxmlformats.org/officeDocument/2006/relationships">
+<p:sld xmlns:a="http://schemas.openxmlformats.org/drawingml/2006/main" xmlns:r="http://schemas.openxmlformats.org/officeDocument/2006/relationships" xmlns:p="http://schemas.openxmlformats.org/presentationml/2006/main">
   <p:cSld>
     <p:bg>
       <p:bgPr>
@@ -5384,7 +5477,14 @@
         <p:cNvGrpSpPr/>
         <p:nvPr/>
       </p:nvGrpSpPr>
-      <p:grpSpPr/>
+      <p:grpSpPr>
+        <a:xfrm>
+          <a:off x="0" y="0"/>
+          <a:ext cx="0" cy="0"/>
+          <a:chOff x="0" y="0"/>
+          <a:chExt cx="0" cy="0"/>
+        </a:xfrm>
+      </p:grpSpPr>
       <p:sp>
         <p:nvSpPr>
           <p:cNvPr id="2" name="TextBox 1"/>
@@ -5473,7 +5573,7 @@
           </a:fontRef>
         </p:style>
         <p:txBody>
-          <a:bodyPr rtlCol="0" anchor="ctr" wrap="square"/>
+          <a:bodyPr wrap="square" rtlCol="0" anchor="ctr"/>
           <a:lstStyle/>
           <a:p>
             <a:pPr algn="ctr">
@@ -5539,7 +5639,7 @@
           </a:fontRef>
         </p:style>
         <p:txBody>
-          <a:bodyPr rtlCol="0" anchor="ctr" wrap="square"/>
+          <a:bodyPr wrap="square" rtlCol="0" anchor="ctr"/>
           <a:lstStyle/>
           <a:p>
             <a:pPr algn="ctr">
@@ -5605,7 +5705,7 @@
           </a:fontRef>
         </p:style>
         <p:txBody>
-          <a:bodyPr rtlCol="0" anchor="ctr" wrap="square"/>
+          <a:bodyPr wrap="square" rtlCol="0" anchor="ctr"/>
           <a:lstStyle/>
           <a:p>
             <a:pPr algn="ctr">
@@ -5671,7 +5771,7 @@
           </a:fontRef>
         </p:style>
         <p:txBody>
-          <a:bodyPr rtlCol="0" anchor="ctr" wrap="square"/>
+          <a:bodyPr wrap="square" rtlCol="0" anchor="ctr"/>
           <a:lstStyle/>
           <a:p>
             <a:pPr algn="ctr">
